--- a/training/decks/t0-plan-and-present.pptx
+++ b/training/decks/t0-plan-and-present.pptx
@@ -676,12 +676,17 @@
           <a:lstStyle/>
           <a:p>
             <a:r>
-              <a:t>Trainer: Present is the operator's screen. One service is open at a time.</a:t>
-            </a:r>
-          </a:p>
-          <a:p>
-            <a:r>
-              <a:t>The big picture with the red frame is what the room sees. Everything else is only for you.</a:t>
+              <a:t>Trainer: Present is the operator's screen. One service is open at a time, and every slide</a:t>
+            </a:r>
+          </a:p>
+          <a:p>
+            <a:r>
+              <a:t>of it is laid out as cards. The card marked LIVE, in red, is what the room sees, and so is the</a:t>
+            </a:r>
+          </a:p>
+          <a:p>
+            <a:r>
+              <a:t>small picture at the top left. Everything else is only for you.</a:t>
             </a:r>
           </a:p>
           <a:p>

--- a/training/decks/t0-plan-and-present.pptx
+++ b/training/decks/t0-plan-and-present.pptx
@@ -691,7 +691,7 @@
           </a:p>
           <a:p>
             <a:r>
-              <a:t>This training is itself a service, open in Present right now.</a:t>
+              <a:t>This training service is open in Present right now, and it works like any other service.</a:t>
             </a:r>
           </a:p>
         </p:txBody>
@@ -3899,7 +3899,7 @@
                 </a:solidFill>
                 <a:latin typeface="Noto Sans"/>
               </a:rPr>
-              <a:t>Training 0</a:t>
+              <a:t>Training Session 0</a:t>
             </a:r>
           </a:p>
         </p:txBody>

--- a/training/decks/t0-plan-and-present.pptx
+++ b/training/decks/t0-plan-and-present.pptx
@@ -686,7 +686,7 @@
           </a:p>
           <a:p>
             <a:r>
-              <a:t>small picture at the top left. Everything else is only for you.</a:t>
+              <a:t>picture at the top right. Everything else is only for you.</a:t>
             </a:r>
           </a:p>
           <a:p>
